--- a/classes/parte-3-hacking-etico-y-pentesting-metodologia/067-reglas-de-engagement-alcance-y-contratos/clase-067-presentacion.pptx
+++ b/classes/parte-3-hacking-etico-y-pentesting-metodologia/067-reglas-de-engagement-alcance-y-contratos/clase-067-presentacion.pptx
@@ -17,6 +17,9 @@
     <p:sldId id="265" r:id="rId16"/>
     <p:sldId id="266" r:id="rId17"/>
     <p:sldId id="267" r:id="rId18"/>
+    <p:sldId id="268" r:id="rId19"/>
+    <p:sldId id="269" r:id="rId20"/>
+    <p:sldId id="270" r:id="rId21"/>
   </p:sldIdLst>
   <p:sldSz cx="9144000" cy="6858000" type="screen4x3"/>
   <p:notesSz cx="6858000" cy="9144000"/>
@@ -3198,7 +3201,7 @@
                   <a:srgbClr val="0B3D2E"/>
                 </a:solidFill>
               </a:rPr>
-              <a:t>⚠️ Errores comunes</a:t>
+              <a:t>✍️ Ejercicios</a:t>
             </a:r>
           </a:p>
         </p:txBody>
@@ -3236,97 +3239,97 @@
                   <a:srgbClr val="22282E"/>
                 </a:solidFill>
               </a:rPr>
-              <a:t>•  "Escaneé una IP que no era del cliente" — Alcance mal delimitado; usa CIDR exactos y valida propiedad antes de tocar</a:t>
-            </a:r>
-          </a:p>
-          <a:p>
-            <a:pPr>
-              <a:spcAft>
-                <a:spcPts val="600"/>
-              </a:spcAft>
-            </a:pPr>
-            <a:r>
-              <a:rPr sz="1500">
-                <a:solidFill>
-                  <a:srgbClr val="22282E"/>
-                </a:solidFill>
-              </a:rPr>
-              <a:t>•  Cliente reclama daños por un servicio caído — No se prohibió DoS en el RoE; añádelo siempre por defecto</a:t>
-            </a:r>
-          </a:p>
-          <a:p>
-            <a:pPr>
-              <a:spcAft>
-                <a:spcPts val="600"/>
-              </a:spcAft>
-            </a:pPr>
-            <a:r>
-              <a:rPr sz="1500">
-                <a:solidFill>
-                  <a:srgbClr val="22282E"/>
-                </a:solidFill>
-              </a:rPr>
-              <a:t>•  No hay a quién llamar cuando algo falla — Falta contacto de emergencia; exige uno disponible en la ventana</a:t>
-            </a:r>
-          </a:p>
-          <a:p>
-            <a:pPr>
-              <a:spcAft>
-                <a:spcPts val="600"/>
-              </a:spcAft>
-            </a:pPr>
-            <a:r>
-              <a:rPr sz="1500">
-                <a:solidFill>
-                  <a:srgbClr val="22282E"/>
-                </a:solidFill>
-              </a:rPr>
-              <a:t>•  Datos personales reales en tus notas — Falta cláusula de manejo; anonimiza y borra según lo pactado</a:t>
-            </a:r>
-          </a:p>
-          <a:p>
-            <a:pPr>
-              <a:spcAft>
-                <a:spcPts val="600"/>
-              </a:spcAft>
-            </a:pPr>
-            <a:r>
-              <a:rPr sz="1500">
-                <a:solidFill>
-                  <a:srgbClr val="22282E"/>
-                </a:solidFill>
-              </a:rPr>
-              <a:t>•  "Firmó el becario" — Autorización sin autoridad legal; exige firmante con capacidad</a:t>
-            </a:r>
-          </a:p>
-          <a:p>
-            <a:pPr>
-              <a:spcAft>
-                <a:spcPts val="600"/>
-              </a:spcAft>
-            </a:pPr>
-            <a:r>
-              <a:rPr sz="1500">
-                <a:solidFill>
-                  <a:srgbClr val="22282E"/>
-                </a:solidFill>
-              </a:rPr>
-              <a:t>•  Evidencia del test sigue en un disco años después — No hubo cláusula de retención; define plazo de destrucción y verifícalo al cierre</a:t>
-            </a:r>
-          </a:p>
-          <a:p>
-            <a:pPr>
-              <a:spcAft>
-                <a:spcPts val="600"/>
-              </a:spcAft>
-            </a:pPr>
-            <a:r>
-              <a:rPr sz="1500">
-                <a:solidFill>
-                  <a:srgbClr val="22282E"/>
-                </a:solidFill>
-              </a:rPr>
-              <a:t>•  Disputa sobre quién autorizó qué técnica — No se firmó una cadena de custodia de decisiones; registra por escrito cada cambio de alcance durante el test</a:t>
+              <a:t>•  Enumera cinco técnicas que casi siempre deberían quedar prohibidas por defecto y explica por qué.</a:t>
+            </a:r>
+          </a:p>
+          <a:p>
+            <a:pPr>
+              <a:spcAft>
+                <a:spcPts val="600"/>
+              </a:spcAft>
+            </a:pPr>
+            <a:r>
+              <a:rPr sz="1500">
+                <a:solidFill>
+                  <a:srgbClr val="22282E"/>
+                </a:solidFill>
+              </a:rPr>
+              <a:t>•  Redacta una cláusula de ventana horaria para un e-commerce que no puede caerse en horario comercial.</a:t>
+            </a:r>
+          </a:p>
+          <a:p>
+            <a:pPr>
+              <a:spcAft>
+                <a:spcPts val="600"/>
+              </a:spcAft>
+            </a:pPr>
+            <a:r>
+              <a:rPr sz="1500">
+                <a:solidFill>
+                  <a:srgbClr val="22282E"/>
+                </a:solidFill>
+              </a:rPr>
+              <a:t>•  Explica la diferencia entre SOW y NDA con un ejemplo.</a:t>
+            </a:r>
+          </a:p>
+          <a:p>
+            <a:pPr>
+              <a:spcAft>
+                <a:spcPts val="600"/>
+              </a:spcAft>
+            </a:pPr>
+            <a:r>
+              <a:rPr sz="1500">
+                <a:solidFill>
+                  <a:srgbClr val="22282E"/>
+                </a:solidFill>
+              </a:rPr>
+              <a:t>•  ¿Qué harías si durante el test descubres evidencia de un compromiso real y activo? Escribe el paso a paso.</a:t>
+            </a:r>
+          </a:p>
+          <a:p>
+            <a:pPr>
+              <a:spcAft>
+                <a:spcPts val="600"/>
+              </a:spcAft>
+            </a:pPr>
+            <a:r>
+              <a:rPr sz="1500">
+                <a:solidFill>
+                  <a:srgbClr val="22282E"/>
+                </a:solidFill>
+              </a:rPr>
+              <a:t>•  Diseña un formulario de hallazgo crítico con los campos mínimos.</a:t>
+            </a:r>
+          </a:p>
+          <a:p>
+            <a:pPr>
+              <a:spcAft>
+                <a:spcPts val="600"/>
+              </a:spcAft>
+            </a:pPr>
+            <a:r>
+              <a:rPr sz="1500">
+                <a:solidFill>
+                  <a:srgbClr val="22282E"/>
+                </a:solidFill>
+              </a:rPr>
+              <a:t>•  Redacta una cláusula de seguro de responsabilidad civil que cubra un incidente accidental durante el test (por ejemplo, una caída de servicio).</a:t>
+            </a:r>
+          </a:p>
+          <a:p>
+            <a:pPr>
+              <a:spcAft>
+                <a:spcPts val="600"/>
+              </a:spcAft>
+            </a:pPr>
+            <a:r>
+              <a:rPr sz="1500">
+                <a:solidFill>
+                  <a:srgbClr val="22282E"/>
+                </a:solidFill>
+              </a:rPr>
+              <a:t>•  Justifica por qué la autorización debe firmarla alguien con autoridad y no cualquier empleado.</a:t>
             </a:r>
           </a:p>
         </p:txBody>
@@ -3377,7 +3380,7 @@
                   <a:srgbClr val="0B3D2E"/>
                 </a:solidFill>
               </a:rPr>
-              <a:t>❓ Preguntas frecuentes</a:t>
+              <a:t>📝 Reto verificable</a:t>
             </a:r>
           </a:p>
         </p:txBody>
@@ -3415,97 +3418,22 @@
                   <a:srgbClr val="22282E"/>
                 </a:solidFill>
               </a:rPr>
-              <a:t>•  ❓ ¿Vale un correo diciendo "adelante" como autorización?</a:t>
-            </a:r>
-          </a:p>
-          <a:p>
-            <a:pPr>
-              <a:spcAft>
-                <a:spcPts val="600"/>
-              </a:spcAft>
-            </a:pPr>
-            <a:r>
-              <a:rPr sz="1500">
-                <a:solidFill>
-                  <a:srgbClr val="22282E"/>
-                </a:solidFill>
-              </a:rPr>
-              <a:t>•  No es recomendable. Un correo puede servir de indicio, pero necesitas una autorización formal firmada por alguien con capacidad para comprometer a la organización.</a:t>
-            </a:r>
-          </a:p>
-          <a:p>
-            <a:pPr>
-              <a:spcAft>
-                <a:spcPts val="600"/>
-              </a:spcAft>
-            </a:pPr>
-            <a:r>
-              <a:rPr sz="1500">
-                <a:solidFill>
-                  <a:srgbClr val="22282E"/>
-                </a:solidFill>
-              </a:rPr>
-              <a:t>•  ❓ ¿Qué pasa si un activo en el alcance en realidad pertenece a un proveedor cloud?</a:t>
-            </a:r>
-          </a:p>
-          <a:p>
-            <a:pPr>
-              <a:spcAft>
-                <a:spcPts val="600"/>
-              </a:spcAft>
-            </a:pPr>
-            <a:r>
-              <a:rPr sz="1500">
-                <a:solidFill>
-                  <a:srgbClr val="22282E"/>
-                </a:solidFill>
-              </a:rPr>
-              <a:t>•  Muchos proveedores exigen su propia autorización para pruebas. Verifica las políticas del proveedor (AWS, Azure, GCP) antes de escanear infraestructura alojada.</a:t>
-            </a:r>
-          </a:p>
-          <a:p>
-            <a:pPr>
-              <a:spcAft>
-                <a:spcPts val="600"/>
-              </a:spcAft>
-            </a:pPr>
-            <a:r>
-              <a:rPr sz="1500">
-                <a:solidFill>
-                  <a:srgbClr val="22282E"/>
-                </a:solidFill>
-              </a:rPr>
-              <a:t>•  ❓ ¿Puedo hacer ingeniería social si no está en el RoE?</a:t>
-            </a:r>
-          </a:p>
-          <a:p>
-            <a:pPr>
-              <a:spcAft>
-                <a:spcPts val="600"/>
-              </a:spcAft>
-            </a:pPr>
-            <a:r>
-              <a:rPr sz="1500">
-                <a:solidFill>
-                  <a:srgbClr val="22282E"/>
-                </a:solidFill>
-              </a:rPr>
-              <a:t>•  No. Cualquier técnica no autorizada explícitamente está prohibida. La ingeniería social suele requerir cláusulas y consentimientos adicionales.</a:t>
-            </a:r>
-          </a:p>
-          <a:p>
-            <a:pPr>
-              <a:spcAft>
-                <a:spcPts val="600"/>
-              </a:spcAft>
-            </a:pPr>
-            <a:r>
-              <a:rPr sz="1500">
-                <a:solidFill>
-                  <a:srgbClr val="22282E"/>
-                </a:solidFill>
-              </a:rPr>
-              <a:t>•  ❓ ¿Debo reportar de inmediato un hallazgo crítico o esperar al informe final?</a:t>
+              <a:t>•  Ensambla un paquete de pre-engagement de dos páginas para tu caso: autorización, RoE (tabla), alcance con exclusiones y procedimiento de escalado.</a:t>
+            </a:r>
+          </a:p>
+          <a:p>
+            <a:pPr>
+              <a:spcAft>
+                <a:spcPts val="600"/>
+              </a:spcAft>
+            </a:pPr>
+            <a:r>
+              <a:rPr sz="1500">
+                <a:solidFill>
+                  <a:srgbClr val="22282E"/>
+                </a:solidFill>
+              </a:rPr>
+              <a:t>•  Criterio de aceptación: el paquete incluye una autorización con firmante identificado, una tabla de RoE con técnicas prohibidas explícitas, un alcance con al menos una exclusión de terceros y un…</a:t>
             </a:r>
           </a:p>
         </p:txBody>
@@ -3556,7 +3484,7 @@
                   <a:srgbClr val="0B3D2E"/>
                 </a:solidFill>
               </a:rPr>
-              <a:t>🔗 Referencias</a:t>
+              <a:t>⚠️ Errores comunes</a:t>
             </a:r>
           </a:p>
         </p:txBody>
@@ -3594,6 +3522,364 @@
                   <a:srgbClr val="22282E"/>
                 </a:solidFill>
               </a:rPr>
+              <a:t>•  "Escaneé una IP que no era del cliente" — Alcance mal delimitado; usa CIDR exactos y valida propiedad antes de tocar</a:t>
+            </a:r>
+          </a:p>
+          <a:p>
+            <a:pPr>
+              <a:spcAft>
+                <a:spcPts val="600"/>
+              </a:spcAft>
+            </a:pPr>
+            <a:r>
+              <a:rPr sz="1500">
+                <a:solidFill>
+                  <a:srgbClr val="22282E"/>
+                </a:solidFill>
+              </a:rPr>
+              <a:t>•  Cliente reclama daños por un servicio caído — No se prohibió DoS en el RoE; añádelo siempre por defecto</a:t>
+            </a:r>
+          </a:p>
+          <a:p>
+            <a:pPr>
+              <a:spcAft>
+                <a:spcPts val="600"/>
+              </a:spcAft>
+            </a:pPr>
+            <a:r>
+              <a:rPr sz="1500">
+                <a:solidFill>
+                  <a:srgbClr val="22282E"/>
+                </a:solidFill>
+              </a:rPr>
+              <a:t>•  No hay a quién llamar cuando algo falla — Falta contacto de emergencia; exige uno disponible en la ventana</a:t>
+            </a:r>
+          </a:p>
+          <a:p>
+            <a:pPr>
+              <a:spcAft>
+                <a:spcPts val="600"/>
+              </a:spcAft>
+            </a:pPr>
+            <a:r>
+              <a:rPr sz="1500">
+                <a:solidFill>
+                  <a:srgbClr val="22282E"/>
+                </a:solidFill>
+              </a:rPr>
+              <a:t>•  Datos personales reales en tus notas — Falta cláusula de manejo; anonimiza y borra según lo pactado</a:t>
+            </a:r>
+          </a:p>
+          <a:p>
+            <a:pPr>
+              <a:spcAft>
+                <a:spcPts val="600"/>
+              </a:spcAft>
+            </a:pPr>
+            <a:r>
+              <a:rPr sz="1500">
+                <a:solidFill>
+                  <a:srgbClr val="22282E"/>
+                </a:solidFill>
+              </a:rPr>
+              <a:t>•  "Firmó el becario" — Autorización sin autoridad legal; exige firmante con capacidad</a:t>
+            </a:r>
+          </a:p>
+          <a:p>
+            <a:pPr>
+              <a:spcAft>
+                <a:spcPts val="600"/>
+              </a:spcAft>
+            </a:pPr>
+            <a:r>
+              <a:rPr sz="1500">
+                <a:solidFill>
+                  <a:srgbClr val="22282E"/>
+                </a:solidFill>
+              </a:rPr>
+              <a:t>•  Evidencia del test sigue en un disco años después — No hubo cláusula de retención; define plazo de destrucción y verifícalo al cierre</a:t>
+            </a:r>
+          </a:p>
+          <a:p>
+            <a:pPr>
+              <a:spcAft>
+                <a:spcPts val="600"/>
+              </a:spcAft>
+            </a:pPr>
+            <a:r>
+              <a:rPr sz="1500">
+                <a:solidFill>
+                  <a:srgbClr val="22282E"/>
+                </a:solidFill>
+              </a:rPr>
+              <a:t>•  Disputa sobre quién autorizó qué técnica — No se firmó una cadena de custodia de decisiones; registra por escrito cada cambio de alcance durante el test</a:t>
+            </a:r>
+          </a:p>
+        </p:txBody>
+      </p:sp>
+    </p:spTree>
+  </p:cSld>
+  <p:clrMapOvr>
+    <a:masterClrMapping/>
+  </p:clrMapOvr>
+</p:sld>
+</file>
+
+<file path=ppt/slides/slide13.xml><?xml version="1.0" encoding="utf-8"?>
+<p:sld xmlns:a="http://schemas.openxmlformats.org/drawingml/2006/main" xmlns:p="http://schemas.openxmlformats.org/presentationml/2006/main" xmlns:r="http://schemas.openxmlformats.org/officeDocument/2006/relationships">
+  <p:cSld>
+    <p:spTree>
+      <p:nvGrpSpPr>
+        <p:cNvPr id="1" name=""/>
+        <p:cNvGrpSpPr/>
+        <p:nvPr/>
+      </p:nvGrpSpPr>
+      <p:grpSpPr/>
+      <p:sp>
+        <p:nvSpPr>
+          <p:cNvPr id="2" name="TextBox 1"/>
+          <p:cNvSpPr txBox="1"/>
+          <p:nvPr/>
+        </p:nvSpPr>
+        <p:spPr>
+          <a:xfrm>
+            <a:off x="457200" y="320040"/>
+            <a:ext cx="8229600" cy="822960"/>
+          </a:xfrm>
+          <a:prstGeom prst="rect">
+            <a:avLst/>
+          </a:prstGeom>
+          <a:noFill/>
+        </p:spPr>
+        <p:txBody>
+          <a:bodyPr wrap="square">
+            <a:spAutoFit/>
+          </a:bodyPr>
+          <a:lstStyle/>
+          <a:p>
+            <a:r>
+              <a:rPr sz="2600" b="1">
+                <a:solidFill>
+                  <a:srgbClr val="0B3D2E"/>
+                </a:solidFill>
+              </a:rPr>
+              <a:t>❓ Preguntas frecuentes</a:t>
+            </a:r>
+          </a:p>
+        </p:txBody>
+      </p:sp>
+      <p:sp>
+        <p:nvSpPr>
+          <p:cNvPr id="3" name="TextBox 2"/>
+          <p:cNvSpPr txBox="1"/>
+          <p:nvPr/>
+        </p:nvSpPr>
+        <p:spPr>
+          <a:xfrm>
+            <a:off x="457200" y="1280160"/>
+            <a:ext cx="8229600" cy="4937760"/>
+          </a:xfrm>
+          <a:prstGeom prst="rect">
+            <a:avLst/>
+          </a:prstGeom>
+          <a:noFill/>
+        </p:spPr>
+        <p:txBody>
+          <a:bodyPr wrap="square">
+            <a:spAutoFit/>
+          </a:bodyPr>
+          <a:lstStyle/>
+          <a:p>
+            <a:pPr>
+              <a:spcAft>
+                <a:spcPts val="600"/>
+              </a:spcAft>
+            </a:pPr>
+            <a:r>
+              <a:rPr sz="1500">
+                <a:solidFill>
+                  <a:srgbClr val="22282E"/>
+                </a:solidFill>
+              </a:rPr>
+              <a:t>•  ❓ ¿Vale un correo diciendo "adelante" como autorización?</a:t>
+            </a:r>
+          </a:p>
+          <a:p>
+            <a:pPr>
+              <a:spcAft>
+                <a:spcPts val="600"/>
+              </a:spcAft>
+            </a:pPr>
+            <a:r>
+              <a:rPr sz="1500">
+                <a:solidFill>
+                  <a:srgbClr val="22282E"/>
+                </a:solidFill>
+              </a:rPr>
+              <a:t>•  No es recomendable. Un correo puede servir de indicio, pero necesitas una autorización formal firmada por alguien con capacidad para comprometer a la organización.</a:t>
+            </a:r>
+          </a:p>
+          <a:p>
+            <a:pPr>
+              <a:spcAft>
+                <a:spcPts val="600"/>
+              </a:spcAft>
+            </a:pPr>
+            <a:r>
+              <a:rPr sz="1500">
+                <a:solidFill>
+                  <a:srgbClr val="22282E"/>
+                </a:solidFill>
+              </a:rPr>
+              <a:t>•  ❓ ¿Qué pasa si un activo en el alcance en realidad pertenece a un proveedor cloud?</a:t>
+            </a:r>
+          </a:p>
+          <a:p>
+            <a:pPr>
+              <a:spcAft>
+                <a:spcPts val="600"/>
+              </a:spcAft>
+            </a:pPr>
+            <a:r>
+              <a:rPr sz="1500">
+                <a:solidFill>
+                  <a:srgbClr val="22282E"/>
+                </a:solidFill>
+              </a:rPr>
+              <a:t>•  Muchos proveedores exigen su propia autorización para pruebas. Verifica las políticas del proveedor (AWS, Azure, GCP) antes de escanear infraestructura alojada.</a:t>
+            </a:r>
+          </a:p>
+          <a:p>
+            <a:pPr>
+              <a:spcAft>
+                <a:spcPts val="600"/>
+              </a:spcAft>
+            </a:pPr>
+            <a:r>
+              <a:rPr sz="1500">
+                <a:solidFill>
+                  <a:srgbClr val="22282E"/>
+                </a:solidFill>
+              </a:rPr>
+              <a:t>•  ❓ ¿Puedo hacer ingeniería social si no está en el RoE?</a:t>
+            </a:r>
+          </a:p>
+          <a:p>
+            <a:pPr>
+              <a:spcAft>
+                <a:spcPts val="600"/>
+              </a:spcAft>
+            </a:pPr>
+            <a:r>
+              <a:rPr sz="1500">
+                <a:solidFill>
+                  <a:srgbClr val="22282E"/>
+                </a:solidFill>
+              </a:rPr>
+              <a:t>•  No. Cualquier técnica no autorizada explícitamente está prohibida. La ingeniería social suele requerir cláusulas y consentimientos adicionales.</a:t>
+            </a:r>
+          </a:p>
+          <a:p>
+            <a:pPr>
+              <a:spcAft>
+                <a:spcPts val="600"/>
+              </a:spcAft>
+            </a:pPr>
+            <a:r>
+              <a:rPr sz="1500">
+                <a:solidFill>
+                  <a:srgbClr val="22282E"/>
+                </a:solidFill>
+              </a:rPr>
+              <a:t>•  ❓ ¿Debo reportar de inmediato un hallazgo crítico o esperar al informe final?</a:t>
+            </a:r>
+          </a:p>
+        </p:txBody>
+      </p:sp>
+    </p:spTree>
+  </p:cSld>
+  <p:clrMapOvr>
+    <a:masterClrMapping/>
+  </p:clrMapOvr>
+</p:sld>
+</file>
+
+<file path=ppt/slides/slide14.xml><?xml version="1.0" encoding="utf-8"?>
+<p:sld xmlns:a="http://schemas.openxmlformats.org/drawingml/2006/main" xmlns:p="http://schemas.openxmlformats.org/presentationml/2006/main" xmlns:r="http://schemas.openxmlformats.org/officeDocument/2006/relationships">
+  <p:cSld>
+    <p:spTree>
+      <p:nvGrpSpPr>
+        <p:cNvPr id="1" name=""/>
+        <p:cNvGrpSpPr/>
+        <p:nvPr/>
+      </p:nvGrpSpPr>
+      <p:grpSpPr/>
+      <p:sp>
+        <p:nvSpPr>
+          <p:cNvPr id="2" name="TextBox 1"/>
+          <p:cNvSpPr txBox="1"/>
+          <p:nvPr/>
+        </p:nvSpPr>
+        <p:spPr>
+          <a:xfrm>
+            <a:off x="457200" y="320040"/>
+            <a:ext cx="8229600" cy="822960"/>
+          </a:xfrm>
+          <a:prstGeom prst="rect">
+            <a:avLst/>
+          </a:prstGeom>
+          <a:noFill/>
+        </p:spPr>
+        <p:txBody>
+          <a:bodyPr wrap="square">
+            <a:spAutoFit/>
+          </a:bodyPr>
+          <a:lstStyle/>
+          <a:p>
+            <a:r>
+              <a:rPr sz="2600" b="1">
+                <a:solidFill>
+                  <a:srgbClr val="0B3D2E"/>
+                </a:solidFill>
+              </a:rPr>
+              <a:t>🔗 Referencias</a:t>
+            </a:r>
+          </a:p>
+        </p:txBody>
+      </p:sp>
+      <p:sp>
+        <p:nvSpPr>
+          <p:cNvPr id="3" name="TextBox 2"/>
+          <p:cNvSpPr txBox="1"/>
+          <p:nvPr/>
+        </p:nvSpPr>
+        <p:spPr>
+          <a:xfrm>
+            <a:off x="457200" y="1280160"/>
+            <a:ext cx="8229600" cy="4937760"/>
+          </a:xfrm>
+          <a:prstGeom prst="rect">
+            <a:avLst/>
+          </a:prstGeom>
+          <a:noFill/>
+        </p:spPr>
+        <p:txBody>
+          <a:bodyPr wrap="square">
+            <a:spAutoFit/>
+          </a:bodyPr>
+          <a:lstStyle/>
+          <a:p>
+            <a:pPr>
+              <a:spcAft>
+                <a:spcPts val="600"/>
+              </a:spcAft>
+            </a:pPr>
+            <a:r>
+              <a:rPr sz="1500">
+                <a:solidFill>
+                  <a:srgbClr val="22282E"/>
+                </a:solidFill>
+              </a:rPr>
               <a:t>•  PTES — Pre-engagement Interactions — &lt;http://www.pentest-standard.org/index.php/Pre-engagement&gt;</a:t>
             </a:r>
           </a:p>
@@ -3674,6 +3960,81 @@
           </a:p>
         </p:txBody>
       </p:sp>
+    </p:spTree>
+  </p:cSld>
+  <p:clrMapOvr>
+    <a:masterClrMapping/>
+  </p:clrMapOvr>
+</p:sld>
+</file>
+
+<file path=ppt/slides/slide15.xml><?xml version="1.0" encoding="utf-8"?>
+<p:sld xmlns:a="http://schemas.openxmlformats.org/drawingml/2006/main" xmlns:p="http://schemas.openxmlformats.org/presentationml/2006/main" xmlns:r="http://schemas.openxmlformats.org/officeDocument/2006/relationships">
+  <p:cSld>
+    <p:spTree>
+      <p:nvGrpSpPr>
+        <p:cNvPr id="1" name=""/>
+        <p:cNvGrpSpPr/>
+        <p:nvPr/>
+      </p:nvGrpSpPr>
+      <p:grpSpPr/>
+      <p:sp>
+        <p:nvSpPr>
+          <p:cNvPr id="2" name="TextBox 1"/>
+          <p:cNvSpPr txBox="1"/>
+          <p:nvPr/>
+        </p:nvSpPr>
+        <p:spPr>
+          <a:xfrm>
+            <a:off x="457200" y="274320"/>
+            <a:ext cx="8229600" cy="640080"/>
+          </a:xfrm>
+          <a:prstGeom prst="rect">
+            <a:avLst/>
+          </a:prstGeom>
+          <a:noFill/>
+        </p:spPr>
+        <p:txBody>
+          <a:bodyPr wrap="square">
+            <a:spAutoFit/>
+          </a:bodyPr>
+          <a:lstStyle/>
+          <a:p>
+            <a:r>
+              <a:rPr sz="2200" b="1">
+                <a:solidFill>
+                  <a:srgbClr val="0B3D2E"/>
+                </a:solidFill>
+              </a:rPr>
+              <a:t>Diagrama de la clase</a:t>
+            </a:r>
+          </a:p>
+        </p:txBody>
+      </p:sp>
+      <p:pic>
+        <p:nvPicPr>
+          <p:cNvPr id="3" name="Picture 2" descr="47c2d2d25050b656.png"/>
+          <p:cNvPicPr>
+            <a:picLocks noChangeAspect="1"/>
+          </p:cNvPicPr>
+          <p:nvPr/>
+        </p:nvPicPr>
+        <p:blipFill>
+          <a:blip r:embed="rId2"/>
+          <a:stretch>
+            <a:fillRect/>
+          </a:stretch>
+        </p:blipFill>
+        <p:spPr>
+          <a:xfrm>
+            <a:off x="457200" y="2907792"/>
+            <a:ext cx="8229600" cy="1682496"/>
+          </a:xfrm>
+          <a:prstGeom prst="rect">
+            <a:avLst/>
+          </a:prstGeom>
+        </p:spPr>
+      </p:pic>
     </p:spTree>
   </p:cSld>
   <p:clrMapOvr>
@@ -3758,7 +4119,7 @@
                   <a:srgbClr val="22282E"/>
                 </a:solidFill>
               </a:rPr>
-              <a:t>•  Aprender a preparar la fase legal y contractual de un pentest: reglas de engagement (RoE), definición precisa del alcance, autorizaciones y documentos que protegen tanto al cliente como al probador. Sin estos papeles, un pentest es indistinguible de un delito.</a:t>
+              <a:t>•  Aprender a preparar la fase legal y contractual de un pentest: reglas de engagement (RoE), definición precisa del alcance, autorizaciones y documentos que protegen tanto al cliente como al probador.…</a:t>
             </a:r>
           </a:p>
         </p:txBody>
@@ -4152,7 +4513,7 @@
                   <a:srgbClr val="0B3D2E"/>
                 </a:solidFill>
               </a:rPr>
-              <a:t>📖 Definiciones y características</a:t>
+              <a:t>🧠 Explicación en profundidad</a:t>
             </a:r>
           </a:p>
         </p:txBody>
@@ -4190,97 +4551,97 @@
                   <a:srgbClr val="22282E"/>
                 </a:solidFill>
               </a:rPr>
-              <a:t>•  Reglas de engagement (RoE): documento que fija cómo, cuándo y con qué límites se realiza el test. Característica clave: incluye ventanas horarias, técnicas prohibidas (DoS, ingeniería social) y activos frágiles.</a:t>
-            </a:r>
-          </a:p>
-          <a:p>
-            <a:pPr>
-              <a:spcAft>
-                <a:spcPts val="600"/>
-              </a:spcAft>
-            </a:pPr>
-            <a:r>
-              <a:rPr sz="1500">
-                <a:solidFill>
-                  <a:srgbClr val="22282E"/>
-                </a:solidFill>
-              </a:rPr>
-              <a:t>•  Statement of Work (SOW): contrato que describe el servicio, entregables, plazos y precio. Característica clave: es la referencia contractual ante disputas.</a:t>
-            </a:r>
-          </a:p>
-          <a:p>
-            <a:pPr>
-              <a:spcAft>
-                <a:spcPts val="600"/>
-              </a:spcAft>
-            </a:pPr>
-            <a:r>
-              <a:rPr sz="1500">
-                <a:solidFill>
-                  <a:srgbClr val="22282E"/>
-                </a:solidFill>
-              </a:rPr>
-              <a:t>•  NDA (acuerdo de confidencialidad): obliga a no divulgar la información hallada. Característica clave: protege datos del cliente incluso tras terminar el trabajo.</a:t>
-            </a:r>
-          </a:p>
-          <a:p>
-            <a:pPr>
-              <a:spcAft>
-                <a:spcPts val="600"/>
-              </a:spcAft>
-            </a:pPr>
-            <a:r>
-              <a:rPr sz="1500">
-                <a:solidFill>
-                  <a:srgbClr val="22282E"/>
-                </a:solidFill>
-              </a:rPr>
-              <a:t>•  Authorization letter ("get out of jail"): carta firmada por alguien con autoridad que autoriza explícitamente las pruebas. Característica clave: se lleva encima durante el test físico o de red.</a:t>
-            </a:r>
-          </a:p>
-          <a:p>
-            <a:pPr>
-              <a:spcAft>
-                <a:spcPts val="600"/>
-              </a:spcAft>
-            </a:pPr>
-            <a:r>
-              <a:rPr sz="1500">
-                <a:solidFill>
-                  <a:srgbClr val="22282E"/>
-                </a:solidFill>
-              </a:rPr>
-              <a:t>•  Alcance (scope): conjunto de activos autorizados. Característica clave: se expresa con precisión (CIDR, dominios, cuentas) y con exclusiones.</a:t>
-            </a:r>
-          </a:p>
-          <a:p>
-            <a:pPr>
-              <a:spcAft>
-                <a:spcPts val="600"/>
-              </a:spcAft>
-            </a:pPr>
-            <a:r>
-              <a:rPr sz="1500">
-                <a:solidFill>
-                  <a:srgbClr val="22282E"/>
-                </a:solidFill>
-              </a:rPr>
-              <a:t>•  Contacto de emergencia: persona del cliente disponible durante la ventana. Característica clave: permite detener el test o coordinar ante un incidente.</a:t>
-            </a:r>
-          </a:p>
-          <a:p>
-            <a:pPr>
-              <a:spcAft>
-                <a:spcPts val="600"/>
-              </a:spcAft>
-            </a:pPr>
-            <a:r>
-              <a:rPr sz="1500">
-                <a:solidFill>
-                  <a:srgbClr val="22282E"/>
-                </a:solidFill>
-              </a:rPr>
-              <a:t>•  Seguro de responsabilidad civil profesional: póliza que cubre daños accidentales causados durante el pentest. Característica clave: muchas empresas exigen su comprobante antes de firmar el contrato.</a:t>
+              <a:t>•  Técnicamente, un pentest y un ataque real son la misma actividad: escanear, explotar,</a:t>
+            </a:r>
+          </a:p>
+          <a:p>
+            <a:pPr>
+              <a:spcAft>
+                <a:spcPts val="600"/>
+              </a:spcAft>
+            </a:pPr>
+            <a:r>
+              <a:rPr sz="1500">
+                <a:solidFill>
+                  <a:srgbClr val="22282E"/>
+                </a:solidFill>
+              </a:rPr>
+              <a:t>•  extraer datos. Lo único que separa a un profesional de un delincuente es un documento de</a:t>
+            </a:r>
+          </a:p>
+          <a:p>
+            <a:pPr>
+              <a:spcAft>
+                <a:spcPts val="600"/>
+              </a:spcAft>
+            </a:pPr>
+            <a:r>
+              <a:rPr sz="1500">
+                <a:solidFill>
+                  <a:srgbClr val="22282E"/>
+                </a:solidFill>
+              </a:rPr>
+              <a:t>•  autorización firmado por alguien con potestad para concederla. Sin ese papel, las mismas</a:t>
+            </a:r>
+          </a:p>
+          <a:p>
+            <a:pPr>
+              <a:spcAft>
+                <a:spcPts val="600"/>
+              </a:spcAft>
+            </a:pPr>
+            <a:r>
+              <a:rPr sz="1500">
+                <a:solidFill>
+                  <a:srgbClr val="22282E"/>
+                </a:solidFill>
+              </a:rPr>
+              <a:t>•  acciones que se facturan como servicio son un delito informático perseguible penalmente</a:t>
+            </a:r>
+          </a:p>
+          <a:p>
+            <a:pPr>
+              <a:spcAft>
+                <a:spcPts val="600"/>
+              </a:spcAft>
+            </a:pPr>
+            <a:r>
+              <a:rPr sz="1500">
+                <a:solidFill>
+                  <a:srgbClr val="22282E"/>
+                </a:solidFill>
+              </a:rPr>
+              <a:t>•  (la Clase 025). No es una formalidad burocrática que se resuelve</a:t>
+            </a:r>
+          </a:p>
+          <a:p>
+            <a:pPr>
+              <a:spcAft>
+                <a:spcPts val="600"/>
+              </a:spcAft>
+            </a:pPr>
+            <a:r>
+              <a:rPr sz="1500">
+                <a:solidFill>
+                  <a:srgbClr val="22282E"/>
+                </a:solidFill>
+              </a:rPr>
+              <a:t>•  "luego": es el requisito previo absoluto, y ningún hallazgo, por valioso que sea, justifica</a:t>
+            </a:r>
+          </a:p>
+          <a:p>
+            <a:pPr>
+              <a:spcAft>
+                <a:spcPts val="600"/>
+              </a:spcAft>
+            </a:pPr>
+            <a:r>
+              <a:rPr sz="1500">
+                <a:solidFill>
+                  <a:srgbClr val="22282E"/>
+                </a:solidFill>
+              </a:rPr>
+              <a:t>•  haber operado sin él.</a:t>
             </a:r>
           </a:p>
         </p:txBody>
@@ -4331,7 +4692,7 @@
                   <a:srgbClr val="0B3D2E"/>
                 </a:solidFill>
               </a:rPr>
-              <a:t>🧰 Herramientas y preparación</a:t>
+              <a:t>📖 Definiciones y características</a:t>
             </a:r>
           </a:p>
         </p:txBody>
@@ -4369,82 +4730,97 @@
                   <a:srgbClr val="22282E"/>
                 </a:solidFill>
               </a:rPr>
-              <a:t>•  Esta clase produce documentos, no ataques. Prepara plantillas de:</a:t>
-            </a:r>
-          </a:p>
-          <a:p>
-            <a:pPr>
-              <a:spcAft>
-                <a:spcPts val="600"/>
-              </a:spcAft>
-            </a:pPr>
-            <a:r>
-              <a:rPr sz="1500">
-                <a:solidFill>
-                  <a:srgbClr val="22282E"/>
-                </a:solidFill>
-              </a:rPr>
-              <a:t>•  Autorización de pruebas firmada por un responsable con capacidad legal.</a:t>
-            </a:r>
-          </a:p>
-          <a:p>
-            <a:pPr>
-              <a:spcAft>
-                <a:spcPts val="600"/>
-              </a:spcAft>
-            </a:pPr>
-            <a:r>
-              <a:rPr sz="1500">
-                <a:solidFill>
-                  <a:srgbClr val="22282E"/>
-                </a:solidFill>
-              </a:rPr>
-              <a:t>•  RoE con tabla de técnicas permitidas/prohibidas.</a:t>
-            </a:r>
-          </a:p>
-          <a:p>
-            <a:pPr>
-              <a:spcAft>
-                <a:spcPts val="600"/>
-              </a:spcAft>
-            </a:pPr>
-            <a:r>
-              <a:rPr sz="1500">
-                <a:solidFill>
-                  <a:srgbClr val="22282E"/>
-                </a:solidFill>
-              </a:rPr>
-              <a:t>•  SOW y NDA (puedes basarte en plantillas públicas del SANS o de despachos, adaptadas por un abogado).</a:t>
-            </a:r>
-          </a:p>
-          <a:p>
-            <a:pPr>
-              <a:spcAft>
-                <a:spcPts val="600"/>
-              </a:spcAft>
-            </a:pPr>
-            <a:r>
-              <a:rPr sz="1500">
-                <a:solidFill>
-                  <a:srgbClr val="22282E"/>
-                </a:solidFill>
-              </a:rPr>
-              <a:t>•  Un formulario de "hallazgo crítico" para escalar de inmediato (por ejemplo, credenciales de dominio expuestas).</a:t>
-            </a:r>
-          </a:p>
-          <a:p>
-            <a:pPr>
-              <a:spcAft>
-                <a:spcPts val="600"/>
-              </a:spcAft>
-            </a:pPr>
-            <a:r>
-              <a:rPr sz="1500">
-                <a:solidFill>
-                  <a:srgbClr val="22282E"/>
-                </a:solidFill>
-              </a:rPr>
-              <a:t>•  Una política interna de retención de evidencia: cuánto tiempo se conservan capturas y credenciales tras el cierre y cómo se destruyen de forma segura.</a:t>
+              <a:t>•  Reglas de engagement (RoE): documento que fija cómo, cuándo y con qué límites se realiza el test. Característica clave: incluye ventanas horarias, técnicas prohibidas (DoS, ingeniería social) y…</a:t>
+            </a:r>
+          </a:p>
+          <a:p>
+            <a:pPr>
+              <a:spcAft>
+                <a:spcPts val="600"/>
+              </a:spcAft>
+            </a:pPr>
+            <a:r>
+              <a:rPr sz="1500">
+                <a:solidFill>
+                  <a:srgbClr val="22282E"/>
+                </a:solidFill>
+              </a:rPr>
+              <a:t>•  Statement of Work (SOW): contrato que describe el servicio, entregables, plazos y precio. Característica clave: es la referencia contractual ante disputas.</a:t>
+            </a:r>
+          </a:p>
+          <a:p>
+            <a:pPr>
+              <a:spcAft>
+                <a:spcPts val="600"/>
+              </a:spcAft>
+            </a:pPr>
+            <a:r>
+              <a:rPr sz="1500">
+                <a:solidFill>
+                  <a:srgbClr val="22282E"/>
+                </a:solidFill>
+              </a:rPr>
+              <a:t>•  NDA (acuerdo de confidencialidad): obliga a no divulgar la información hallada. Característica clave: protege datos del cliente incluso tras terminar el trabajo.</a:t>
+            </a:r>
+          </a:p>
+          <a:p>
+            <a:pPr>
+              <a:spcAft>
+                <a:spcPts val="600"/>
+              </a:spcAft>
+            </a:pPr>
+            <a:r>
+              <a:rPr sz="1500">
+                <a:solidFill>
+                  <a:srgbClr val="22282E"/>
+                </a:solidFill>
+              </a:rPr>
+              <a:t>•  Authorization letter ("get out of jail"): carta firmada por alguien con autoridad que autoriza explícitamente las pruebas. Característica clave: se lleva encima durante el test físico o de red.</a:t>
+            </a:r>
+          </a:p>
+          <a:p>
+            <a:pPr>
+              <a:spcAft>
+                <a:spcPts val="600"/>
+              </a:spcAft>
+            </a:pPr>
+            <a:r>
+              <a:rPr sz="1500">
+                <a:solidFill>
+                  <a:srgbClr val="22282E"/>
+                </a:solidFill>
+              </a:rPr>
+              <a:t>•  Alcance (scope): conjunto de activos autorizados. Característica clave: se expresa con precisión (CIDR, dominios, cuentas) y con exclusiones.</a:t>
+            </a:r>
+          </a:p>
+          <a:p>
+            <a:pPr>
+              <a:spcAft>
+                <a:spcPts val="600"/>
+              </a:spcAft>
+            </a:pPr>
+            <a:r>
+              <a:rPr sz="1500">
+                <a:solidFill>
+                  <a:srgbClr val="22282E"/>
+                </a:solidFill>
+              </a:rPr>
+              <a:t>•  Contacto de emergencia: persona del cliente disponible durante la ventana. Característica clave: permite detener el test o coordinar ante un incidente.</a:t>
+            </a:r>
+          </a:p>
+          <a:p>
+            <a:pPr>
+              <a:spcAft>
+                <a:spcPts val="600"/>
+              </a:spcAft>
+            </a:pPr>
+            <a:r>
+              <a:rPr sz="1500">
+                <a:solidFill>
+                  <a:srgbClr val="22282E"/>
+                </a:solidFill>
+              </a:rPr>
+              <a:t>•  Seguro de responsabilidad civil profesional: póliza que cubre daños accidentales causados durante el pentest. Característica clave: muchas empresas exigen su comprobante antes de firmar el contrato.</a:t>
             </a:r>
           </a:p>
         </p:txBody>
@@ -4495,7 +4871,7 @@
                   <a:srgbClr val="0B3D2E"/>
                 </a:solidFill>
               </a:rPr>
-              <a:t>🧪 Laboratorio guiado (ejercicio aplicado)</a:t>
+              <a:t>📔 Glosario</a:t>
             </a:r>
           </a:p>
         </p:txBody>
@@ -4533,97 +4909,97 @@
                   <a:srgbClr val="22282E"/>
                 </a:solidFill>
               </a:rPr>
-              <a:t>•  Retoma el caso ficticio de la clase 066 (pyme de e-commerce).</a:t>
-            </a:r>
-          </a:p>
-          <a:p>
-            <a:pPr>
-              <a:spcAft>
-                <a:spcPts val="600"/>
-              </a:spcAft>
-            </a:pPr>
-            <a:r>
-              <a:rPr sz="1500">
-                <a:solidFill>
-                  <a:srgbClr val="22282E"/>
-                </a:solidFill>
-              </a:rPr>
-              <a:t>•  Redacta una carta de autorización de 5–8 líneas: quién autoriza, qué autoriza, sobre qué activos y en qué fechas.</a:t>
-            </a:r>
-          </a:p>
-          <a:p>
-            <a:pPr>
-              <a:spcAft>
-                <a:spcPts val="600"/>
-              </a:spcAft>
-            </a:pPr>
-            <a:r>
-              <a:rPr sz="1500">
-                <a:solidFill>
-                  <a:srgbClr val="22282E"/>
-                </a:solidFill>
-              </a:rPr>
-              <a:t>•  Construye una tabla de RoE con al menos 6 técnicas, marcando permitido/prohibido (ej.: escaneo de puertos = permitido; DoS = prohibido; ingeniería social telefónica = prohibido).</a:t>
-            </a:r>
-          </a:p>
-          <a:p>
-            <a:pPr>
-              <a:spcAft>
-                <a:spcPts val="600"/>
-              </a:spcAft>
-            </a:pPr>
-            <a:r>
-              <a:rPr sz="1500">
-                <a:solidFill>
-                  <a:srgbClr val="22282E"/>
-                </a:solidFill>
-              </a:rPr>
-              <a:t>•  Define el alcance en notación CIDR y dominios, con una sección "Fuera de alcance" que incluya al menos un sistema de terceros (proveedor de pagos).</a:t>
-            </a:r>
-          </a:p>
-          <a:p>
-            <a:pPr>
-              <a:spcAft>
-                <a:spcPts val="600"/>
-              </a:spcAft>
-            </a:pPr>
-            <a:r>
-              <a:rPr sz="1500">
-                <a:solidFill>
-                  <a:srgbClr val="22282E"/>
-                </a:solidFill>
-              </a:rPr>
-              <a:t>•  Escribe el procedimiento de escalado: qué haces si encuentras una brecha ya explotada por un tercero.</a:t>
-            </a:r>
-          </a:p>
-          <a:p>
-            <a:pPr>
-              <a:spcAft>
-                <a:spcPts val="600"/>
-              </a:spcAft>
-            </a:pPr>
-            <a:r>
-              <a:rPr sz="1500">
-                <a:solidFill>
-                  <a:srgbClr val="22282E"/>
-                </a:solidFill>
-              </a:rPr>
-              <a:t>•  Añade una cláusula de manejo de datos: cómo tratas capturas que contengan datos personales reales.</a:t>
-            </a:r>
-          </a:p>
-          <a:p>
-            <a:pPr>
-              <a:spcAft>
-                <a:spcPts val="600"/>
-              </a:spcAft>
-            </a:pPr>
-            <a:r>
-              <a:rPr sz="1500">
-                <a:solidFill>
-                  <a:srgbClr val="22282E"/>
-                </a:solidFill>
-              </a:rPr>
-              <a:t>•  Redacta una cláusula de retención y destrucción de evidencia: plazo máximo de conservación tras el cierre y método de borrado seguro.</a:t>
+              <a:t>•  Término — Definición concisa</a:t>
+            </a:r>
+          </a:p>
+          <a:p>
+            <a:pPr>
+              <a:spcAft>
+                <a:spcPts val="600"/>
+              </a:spcAft>
+            </a:pPr>
+            <a:r>
+              <a:rPr sz="1500">
+                <a:solidFill>
+                  <a:srgbClr val="22282E"/>
+                </a:solidFill>
+              </a:rPr>
+              <a:t>•  Autorización escrita — Permiso firmado; la línea que separa el pentest del delito</a:t>
+            </a:r>
+          </a:p>
+          <a:p>
+            <a:pPr>
+              <a:spcAft>
+                <a:spcPts val="600"/>
+              </a:spcAft>
+            </a:pPr>
+            <a:r>
+              <a:rPr sz="1500">
+                <a:solidFill>
+                  <a:srgbClr val="22282E"/>
+                </a:solidFill>
+              </a:rPr>
+              <a:t>•  Get out of jail letter — Autorización que el pentester lleva encima durante el test</a:t>
+            </a:r>
+          </a:p>
+          <a:p>
+            <a:pPr>
+              <a:spcAft>
+                <a:spcPts val="600"/>
+              </a:spcAft>
+            </a:pPr>
+            <a:r>
+              <a:rPr sz="1500">
+                <a:solidFill>
+                  <a:srgbClr val="22282E"/>
+                </a:solidFill>
+              </a:rPr>
+              <a:t>•  Potestad para autorizar — Quien firma debe poder consentir sobre el activo (nube, SaaS)</a:t>
+            </a:r>
+          </a:p>
+          <a:p>
+            <a:pPr>
+              <a:spcAft>
+                <a:spcPts val="600"/>
+              </a:spcAft>
+            </a:pPr>
+            <a:r>
+              <a:rPr sz="1500">
+                <a:solidFill>
+                  <a:srgbClr val="22282E"/>
+                </a:solidFill>
+              </a:rPr>
+              <a:t>•  Alcance (scope) — Lista de sistemas y acciones permitidos; negación por defecto</a:t>
+            </a:r>
+          </a:p>
+          <a:p>
+            <a:pPr>
+              <a:spcAft>
+                <a:spcPts val="600"/>
+              </a:spcAft>
+            </a:pPr>
+            <a:r>
+              <a:rPr sz="1500">
+                <a:solidFill>
+                  <a:srgbClr val="22282E"/>
+                </a:solidFill>
+              </a:rPr>
+              <a:t>•  Scope creep — Ampliar el alcance sobre la marcha; riesgo legal</a:t>
+            </a:r>
+          </a:p>
+          <a:p>
+            <a:pPr>
+              <a:spcAft>
+                <a:spcPts val="600"/>
+              </a:spcAft>
+            </a:pPr>
+            <a:r>
+              <a:rPr sz="1500">
+                <a:solidFill>
+                  <a:srgbClr val="22282E"/>
+                </a:solidFill>
+              </a:rPr>
+              <a:t>•  RoE — Reglas de engagement: ventanas, técnicas y límites operativos</a:t>
             </a:r>
           </a:p>
         </p:txBody>
@@ -4674,7 +5050,7 @@
                   <a:srgbClr val="0B3D2E"/>
                 </a:solidFill>
               </a:rPr>
-              <a:t>✍️ Ejercicios</a:t>
+              <a:t>🧰 Herramientas y preparación</a:t>
             </a:r>
           </a:p>
         </p:txBody>
@@ -4712,97 +5088,82 @@
                   <a:srgbClr val="22282E"/>
                 </a:solidFill>
               </a:rPr>
-              <a:t>•  Enumera cinco técnicas que casi siempre deberían quedar prohibidas por defecto y explica por qué.</a:t>
-            </a:r>
-          </a:p>
-          <a:p>
-            <a:pPr>
-              <a:spcAft>
-                <a:spcPts val="600"/>
-              </a:spcAft>
-            </a:pPr>
-            <a:r>
-              <a:rPr sz="1500">
-                <a:solidFill>
-                  <a:srgbClr val="22282E"/>
-                </a:solidFill>
-              </a:rPr>
-              <a:t>•  Redacta una cláusula de ventana horaria para un e-commerce que no puede caerse en horario comercial.</a:t>
-            </a:r>
-          </a:p>
-          <a:p>
-            <a:pPr>
-              <a:spcAft>
-                <a:spcPts val="600"/>
-              </a:spcAft>
-            </a:pPr>
-            <a:r>
-              <a:rPr sz="1500">
-                <a:solidFill>
-                  <a:srgbClr val="22282E"/>
-                </a:solidFill>
-              </a:rPr>
-              <a:t>•  Explica la diferencia entre SOW y NDA con un ejemplo.</a:t>
-            </a:r>
-          </a:p>
-          <a:p>
-            <a:pPr>
-              <a:spcAft>
-                <a:spcPts val="600"/>
-              </a:spcAft>
-            </a:pPr>
-            <a:r>
-              <a:rPr sz="1500">
-                <a:solidFill>
-                  <a:srgbClr val="22282E"/>
-                </a:solidFill>
-              </a:rPr>
-              <a:t>•  ¿Qué harías si durante el test descubres evidencia de un compromiso real y activo? Escribe el paso a paso.</a:t>
-            </a:r>
-          </a:p>
-          <a:p>
-            <a:pPr>
-              <a:spcAft>
-                <a:spcPts val="600"/>
-              </a:spcAft>
-            </a:pPr>
-            <a:r>
-              <a:rPr sz="1500">
-                <a:solidFill>
-                  <a:srgbClr val="22282E"/>
-                </a:solidFill>
-              </a:rPr>
-              <a:t>•  Diseña un formulario de hallazgo crítico con los campos mínimos.</a:t>
-            </a:r>
-          </a:p>
-          <a:p>
-            <a:pPr>
-              <a:spcAft>
-                <a:spcPts val="600"/>
-              </a:spcAft>
-            </a:pPr>
-            <a:r>
-              <a:rPr sz="1500">
-                <a:solidFill>
-                  <a:srgbClr val="22282E"/>
-                </a:solidFill>
-              </a:rPr>
-              <a:t>•  Redacta una cláusula de seguro de responsabilidad civil que cubra un incidente accidental durante el test (por ejemplo, una caída de servicio).</a:t>
-            </a:r>
-          </a:p>
-          <a:p>
-            <a:pPr>
-              <a:spcAft>
-                <a:spcPts val="600"/>
-              </a:spcAft>
-            </a:pPr>
-            <a:r>
-              <a:rPr sz="1500">
-                <a:solidFill>
-                  <a:srgbClr val="22282E"/>
-                </a:solidFill>
-              </a:rPr>
-              <a:t>•  Justifica por qué la autorización debe firmarla alguien con autoridad y no cualquier empleado.</a:t>
+              <a:t>•  Esta clase produce documentos, no ataques. Prepara plantillas de:</a:t>
+            </a:r>
+          </a:p>
+          <a:p>
+            <a:pPr>
+              <a:spcAft>
+                <a:spcPts val="600"/>
+              </a:spcAft>
+            </a:pPr>
+            <a:r>
+              <a:rPr sz="1500">
+                <a:solidFill>
+                  <a:srgbClr val="22282E"/>
+                </a:solidFill>
+              </a:rPr>
+              <a:t>•  Autorización de pruebas firmada por un responsable con capacidad legal.</a:t>
+            </a:r>
+          </a:p>
+          <a:p>
+            <a:pPr>
+              <a:spcAft>
+                <a:spcPts val="600"/>
+              </a:spcAft>
+            </a:pPr>
+            <a:r>
+              <a:rPr sz="1500">
+                <a:solidFill>
+                  <a:srgbClr val="22282E"/>
+                </a:solidFill>
+              </a:rPr>
+              <a:t>•  RoE con tabla de técnicas permitidas/prohibidas.</a:t>
+            </a:r>
+          </a:p>
+          <a:p>
+            <a:pPr>
+              <a:spcAft>
+                <a:spcPts val="600"/>
+              </a:spcAft>
+            </a:pPr>
+            <a:r>
+              <a:rPr sz="1500">
+                <a:solidFill>
+                  <a:srgbClr val="22282E"/>
+                </a:solidFill>
+              </a:rPr>
+              <a:t>•  SOW y NDA (puedes basarte en plantillas públicas del SANS o de despachos, adaptadas por un abogado).</a:t>
+            </a:r>
+          </a:p>
+          <a:p>
+            <a:pPr>
+              <a:spcAft>
+                <a:spcPts val="600"/>
+              </a:spcAft>
+            </a:pPr>
+            <a:r>
+              <a:rPr sz="1500">
+                <a:solidFill>
+                  <a:srgbClr val="22282E"/>
+                </a:solidFill>
+              </a:rPr>
+              <a:t>•  Un formulario de "hallazgo crítico" para escalar de inmediato (por ejemplo, credenciales de dominio expuestas).</a:t>
+            </a:r>
+          </a:p>
+          <a:p>
+            <a:pPr>
+              <a:spcAft>
+                <a:spcPts val="600"/>
+              </a:spcAft>
+            </a:pPr>
+            <a:r>
+              <a:rPr sz="1500">
+                <a:solidFill>
+                  <a:srgbClr val="22282E"/>
+                </a:solidFill>
+              </a:rPr>
+              <a:t>•  Una política interna de retención de evidencia: cuánto tiempo se conservan capturas y credenciales tras el cierre y cómo se destruyen de forma segura.</a:t>
             </a:r>
           </a:p>
         </p:txBody>
@@ -4853,7 +5214,7 @@
                   <a:srgbClr val="0B3D2E"/>
                 </a:solidFill>
               </a:rPr>
-              <a:t>📝 Reto verificable</a:t>
+              <a:t>🧪 Laboratorio guiado (ejercicio aplicado)</a:t>
             </a:r>
           </a:p>
         </p:txBody>
@@ -4891,22 +5252,97 @@
                   <a:srgbClr val="22282E"/>
                 </a:solidFill>
               </a:rPr>
-              <a:t>•  Ensambla un paquete de pre-engagement de dos páginas para tu caso: autorización, RoE (tabla), alcance con exclusiones y procedimiento de escalado.</a:t>
-            </a:r>
-          </a:p>
-          <a:p>
-            <a:pPr>
-              <a:spcAft>
-                <a:spcPts val="600"/>
-              </a:spcAft>
-            </a:pPr>
-            <a:r>
-              <a:rPr sz="1500">
-                <a:solidFill>
-                  <a:srgbClr val="22282E"/>
-                </a:solidFill>
-              </a:rPr>
-              <a:t>•  Criterio de aceptación: el paquete incluye una autorización con firmante identificado, una tabla de RoE con técnicas prohibidas explícitas, un alcance con al menos una exclusión de terceros y un procedimiento de escalado accionable. Un tercero podría ejecutar el test sin ambigüedad legal.</a:t>
+              <a:t>•  Retoma el caso ficticio de la clase 066 (pyme de e-commerce).</a:t>
+            </a:r>
+          </a:p>
+          <a:p>
+            <a:pPr>
+              <a:spcAft>
+                <a:spcPts val="600"/>
+              </a:spcAft>
+            </a:pPr>
+            <a:r>
+              <a:rPr sz="1500">
+                <a:solidFill>
+                  <a:srgbClr val="22282E"/>
+                </a:solidFill>
+              </a:rPr>
+              <a:t>•  Redacta una carta de autorización de 5–8 líneas: quién autoriza, qué autoriza, sobre qué activos y en qué fechas.</a:t>
+            </a:r>
+          </a:p>
+          <a:p>
+            <a:pPr>
+              <a:spcAft>
+                <a:spcPts val="600"/>
+              </a:spcAft>
+            </a:pPr>
+            <a:r>
+              <a:rPr sz="1500">
+                <a:solidFill>
+                  <a:srgbClr val="22282E"/>
+                </a:solidFill>
+              </a:rPr>
+              <a:t>•  Construye una tabla de RoE con al menos 6 técnicas, marcando permitido/prohibido (ej.: escaneo de puertos = permitido; DoS = prohibido; ingeniería social telefónica = prohibido).</a:t>
+            </a:r>
+          </a:p>
+          <a:p>
+            <a:pPr>
+              <a:spcAft>
+                <a:spcPts val="600"/>
+              </a:spcAft>
+            </a:pPr>
+            <a:r>
+              <a:rPr sz="1500">
+                <a:solidFill>
+                  <a:srgbClr val="22282E"/>
+                </a:solidFill>
+              </a:rPr>
+              <a:t>•  Define el alcance en notación CIDR y dominios, con una sección "Fuera de alcance" que incluya al menos un sistema de terceros (proveedor de pagos).</a:t>
+            </a:r>
+          </a:p>
+          <a:p>
+            <a:pPr>
+              <a:spcAft>
+                <a:spcPts val="600"/>
+              </a:spcAft>
+            </a:pPr>
+            <a:r>
+              <a:rPr sz="1500">
+                <a:solidFill>
+                  <a:srgbClr val="22282E"/>
+                </a:solidFill>
+              </a:rPr>
+              <a:t>•  Escribe el procedimiento de escalado: qué haces si encuentras una brecha ya explotada por un tercero.</a:t>
+            </a:r>
+          </a:p>
+          <a:p>
+            <a:pPr>
+              <a:spcAft>
+                <a:spcPts val="600"/>
+              </a:spcAft>
+            </a:pPr>
+            <a:r>
+              <a:rPr sz="1500">
+                <a:solidFill>
+                  <a:srgbClr val="22282E"/>
+                </a:solidFill>
+              </a:rPr>
+              <a:t>•  Añade una cláusula de manejo de datos: cómo tratas capturas que contengan datos personales reales.</a:t>
+            </a:r>
+          </a:p>
+          <a:p>
+            <a:pPr>
+              <a:spcAft>
+                <a:spcPts val="600"/>
+              </a:spcAft>
+            </a:pPr>
+            <a:r>
+              <a:rPr sz="1500">
+                <a:solidFill>
+                  <a:srgbClr val="22282E"/>
+                </a:solidFill>
+              </a:rPr>
+              <a:t>•  Redacta una cláusula de retención y destrucción de evidencia: plazo máximo de conservación tras el cierre y método de borrado seguro.</a:t>
             </a:r>
           </a:p>
         </p:txBody>
